--- a/Przeglad_koncowy_notes_ai.pptx
+++ b/Przeglad_koncowy_notes_ai.pptx
@@ -7,7 +7,7 @@
     <p:sldMasterId id="2147483663" r:id="rId3"/>
   </p:sldMasterIdLst>
   <p:notesMasterIdLst>
-    <p:notesMasterId r:id="rId57"/>
+    <p:notesMasterId r:id="rId67"/>
   </p:notesMasterIdLst>
   <p:sldIdLst>
     <p:sldId id="256" r:id="rId4"/>
@@ -57,12 +57,22 @@
     <p:sldId id="309" r:id="rId48"/>
     <p:sldId id="279" r:id="rId49"/>
     <p:sldId id="280" r:id="rId50"/>
-    <p:sldId id="281" r:id="rId51"/>
-    <p:sldId id="282" r:id="rId52"/>
-    <p:sldId id="283" r:id="rId53"/>
-    <p:sldId id="284" r:id="rId54"/>
-    <p:sldId id="285" r:id="rId55"/>
-    <p:sldId id="286" r:id="rId56"/>
+    <p:sldId id="310" r:id="rId51"/>
+    <p:sldId id="311" r:id="rId52"/>
+    <p:sldId id="312" r:id="rId53"/>
+    <p:sldId id="313" r:id="rId54"/>
+    <p:sldId id="314" r:id="rId55"/>
+    <p:sldId id="281" r:id="rId56"/>
+    <p:sldId id="315" r:id="rId57"/>
+    <p:sldId id="316" r:id="rId58"/>
+    <p:sldId id="317" r:id="rId59"/>
+    <p:sldId id="318" r:id="rId60"/>
+    <p:sldId id="319" r:id="rId61"/>
+    <p:sldId id="282" r:id="rId62"/>
+    <p:sldId id="283" r:id="rId63"/>
+    <p:sldId id="284" r:id="rId64"/>
+    <p:sldId id="285" r:id="rId65"/>
+    <p:sldId id="286" r:id="rId66"/>
   </p:sldIdLst>
   <p:sldSz cx="9144000" cy="6858000" type="screen4x3"/>
   <p:notesSz cx="6858000" cy="9144000"/>
@@ -41243,14 +41253,13 @@
           </a:bodyPr>
           <a:lstStyle/>
           <a:p>
-            <a:pPr indent="0">
+            <a:pPr>
               <a:lnSpc>
                 <a:spcPct val="100000"/>
               </a:lnSpc>
-              <a:buNone/>
             </a:pPr>
             <a:r>
-              <a:rPr lang="pl-PL" sz="2400" b="0" u="none" strike="noStrike">
+              <a:rPr lang="pl-PL" sz="2400" b="0" u="none" strike="noStrike" dirty="0">
                 <a:solidFill>
                   <a:schemeClr val="accent2">
                     <a:lumMod val="75000"/>
@@ -41262,7 +41271,17 @@
               </a:rPr>
               <a:t>Diagram klas projektowych</a:t>
             </a:r>
-            <a:endParaRPr lang="en-GB" sz="2400" b="0" u="none" strike="noStrike">
+            <a:r>
+              <a:rPr lang="pl-PL" sz="2400" dirty="0">
+                <a:solidFill>
+                  <a:schemeClr val="accent2">
+                    <a:lumMod val="75000"/>
+                  </a:schemeClr>
+                </a:solidFill>
+              </a:rPr>
+              <a:t> Interfejsy - Przekształcenie notatki</a:t>
+            </a:r>
+            <a:endParaRPr lang="en-GB" sz="2400" b="0" u="none" strike="noStrike" dirty="0">
               <a:solidFill>
                 <a:schemeClr val="lt1"/>
               </a:solidFill>
@@ -41273,6 +41292,36 @@
           </a:p>
         </p:txBody>
       </p:sp>
+      <p:pic>
+        <p:nvPicPr>
+          <p:cNvPr id="3" name="Picture 2">
+            <a:extLst>
+              <a:ext uri="{FF2B5EF4-FFF2-40B4-BE49-F238E27FC236}">
+                <a16:creationId xmlns:a16="http://schemas.microsoft.com/office/drawing/2014/main" id="{D677BEC2-503B-5928-49C3-96BA728E10A2}"/>
+              </a:ext>
+            </a:extLst>
+          </p:cNvPr>
+          <p:cNvPicPr>
+            <a:picLocks noChangeAspect="1"/>
+          </p:cNvPicPr>
+          <p:nvPr/>
+        </p:nvPicPr>
+        <p:blipFill>
+          <a:blip r:embed="rId2"/>
+          <a:stretch>
+            <a:fillRect/>
+          </a:stretch>
+        </p:blipFill>
+        <p:spPr>
+          <a:xfrm>
+            <a:off x="1872803" y="1373763"/>
+            <a:ext cx="5518597" cy="4787712"/>
+          </a:xfrm>
+          <a:prstGeom prst="rect">
+            <a:avLst/>
+          </a:prstGeom>
+        </p:spPr>
+      </p:pic>
     </p:spTree>
   </p:cSld>
   <p:clrMapOvr>
@@ -41286,7 +41335,13 @@
   <p:cSld>
     <p:spTree>
       <p:nvGrpSpPr>
-        <p:cNvPr id="1" name=""/>
+        <p:cNvPr id="1" name="">
+          <a:extLst>
+            <a:ext uri="{FF2B5EF4-FFF2-40B4-BE49-F238E27FC236}">
+              <a16:creationId xmlns:a16="http://schemas.microsoft.com/office/drawing/2014/main" id="{F6FE0AE7-5427-E9AA-F5DB-A2627F32CC44}"/>
+            </a:ext>
+          </a:extLst>
+        </p:cNvPr>
         <p:cNvGrpSpPr/>
         <p:nvPr/>
       </p:nvGrpSpPr>
@@ -41300,7 +41355,13 @@
       </p:grpSpPr>
       <p:sp>
         <p:nvSpPr>
-          <p:cNvPr id="300" name="PlaceHolder 1"/>
+          <p:cNvPr id="299" name="PlaceHolder 1">
+            <a:extLst>
+              <a:ext uri="{FF2B5EF4-FFF2-40B4-BE49-F238E27FC236}">
+                <a16:creationId xmlns:a16="http://schemas.microsoft.com/office/drawing/2014/main" id="{44C817FF-6215-1D1C-7764-5A59E2FC96CE}"/>
+              </a:ext>
+            </a:extLst>
+          </p:cNvPr>
           <p:cNvSpPr>
             <a:spLocks noGrp="1"/>
           </p:cNvSpPr>
@@ -41327,14 +41388,13 @@
           </a:bodyPr>
           <a:lstStyle/>
           <a:p>
-            <a:pPr indent="0">
+            <a:pPr>
               <a:lnSpc>
                 <a:spcPct val="100000"/>
               </a:lnSpc>
-              <a:buNone/>
             </a:pPr>
             <a:r>
-              <a:rPr lang="pl-PL" sz="2400" b="0" u="none" strike="noStrike">
+              <a:rPr lang="pl-PL" sz="2400" b="0" u="none" strike="noStrike" dirty="0">
                 <a:solidFill>
                   <a:schemeClr val="accent2">
                     <a:lumMod val="75000"/>
@@ -41344,9 +41404,19 @@
                 <a:uFillTx/>
                 <a:latin typeface="Calibri"/>
               </a:rPr>
-              <a:t>Opis klas projektowych</a:t>
-            </a:r>
-            <a:endParaRPr lang="en-GB" sz="2400" b="0" u="none" strike="noStrike">
+              <a:t>Diagram klas projektowych</a:t>
+            </a:r>
+            <a:r>
+              <a:rPr lang="pl-PL" sz="2400" dirty="0">
+                <a:solidFill>
+                  <a:schemeClr val="accent2">
+                    <a:lumMod val="75000"/>
+                  </a:schemeClr>
+                </a:solidFill>
+              </a:rPr>
+              <a:t> Interfejsy - Administracja systemem</a:t>
+            </a:r>
+            <a:endParaRPr lang="en-GB" sz="2400" b="0" u="none" strike="noStrike" dirty="0">
               <a:solidFill>
                 <a:schemeClr val="lt1"/>
               </a:solidFill>
@@ -41357,7 +41427,42 @@
           </a:p>
         </p:txBody>
       </p:sp>
+      <p:pic>
+        <p:nvPicPr>
+          <p:cNvPr id="4" name="Picture 3">
+            <a:extLst>
+              <a:ext uri="{FF2B5EF4-FFF2-40B4-BE49-F238E27FC236}">
+                <a16:creationId xmlns:a16="http://schemas.microsoft.com/office/drawing/2014/main" id="{91F13B88-49A0-9B85-D38F-20B968DDD2CE}"/>
+              </a:ext>
+            </a:extLst>
+          </p:cNvPr>
+          <p:cNvPicPr>
+            <a:picLocks noChangeAspect="1"/>
+          </p:cNvPicPr>
+          <p:nvPr/>
+        </p:nvPicPr>
+        <p:blipFill>
+          <a:blip r:embed="rId2"/>
+          <a:stretch>
+            <a:fillRect/>
+          </a:stretch>
+        </p:blipFill>
+        <p:spPr>
+          <a:xfrm>
+            <a:off x="1953652" y="1701800"/>
+            <a:ext cx="5236696" cy="4599385"/>
+          </a:xfrm>
+          <a:prstGeom prst="rect">
+            <a:avLst/>
+          </a:prstGeom>
+        </p:spPr>
+      </p:pic>
     </p:spTree>
+    <p:extLst>
+      <p:ext uri="{BB962C8B-B14F-4D97-AF65-F5344CB8AC3E}">
+        <p14:creationId xmlns:p14="http://schemas.microsoft.com/office/powerpoint/2010/main" val="2932575005"/>
+      </p:ext>
+    </p:extLst>
   </p:cSld>
   <p:clrMapOvr>
     <a:masterClrMapping/>
@@ -41370,7 +41475,13 @@
   <p:cSld>
     <p:spTree>
       <p:nvGrpSpPr>
-        <p:cNvPr id="1" name=""/>
+        <p:cNvPr id="1" name="">
+          <a:extLst>
+            <a:ext uri="{FF2B5EF4-FFF2-40B4-BE49-F238E27FC236}">
+              <a16:creationId xmlns:a16="http://schemas.microsoft.com/office/drawing/2014/main" id="{08E32977-D723-46AB-7CEA-DA63B6ED5749}"/>
+            </a:ext>
+          </a:extLst>
+        </p:cNvPr>
         <p:cNvGrpSpPr/>
         <p:nvPr/>
       </p:nvGrpSpPr>
@@ -41384,7 +41495,13 @@
       </p:grpSpPr>
       <p:sp>
         <p:nvSpPr>
-          <p:cNvPr id="301" name="PlaceHolder 1"/>
+          <p:cNvPr id="299" name="PlaceHolder 1">
+            <a:extLst>
+              <a:ext uri="{FF2B5EF4-FFF2-40B4-BE49-F238E27FC236}">
+                <a16:creationId xmlns:a16="http://schemas.microsoft.com/office/drawing/2014/main" id="{23B28216-BE09-DC7B-191A-448EDBD40DBA}"/>
+              </a:ext>
+            </a:extLst>
+          </p:cNvPr>
           <p:cNvSpPr>
             <a:spLocks noGrp="1"/>
           </p:cNvSpPr>
@@ -41411,14 +41528,13 @@
           </a:bodyPr>
           <a:lstStyle/>
           <a:p>
-            <a:pPr indent="0">
+            <a:pPr>
               <a:lnSpc>
                 <a:spcPct val="100000"/>
               </a:lnSpc>
-              <a:buNone/>
             </a:pPr>
             <a:r>
-              <a:rPr lang="pl-PL" sz="2400" b="0" u="none" strike="noStrike">
+              <a:rPr lang="pl-PL" sz="2400" b="0" u="none" strike="noStrike" dirty="0">
                 <a:solidFill>
                   <a:schemeClr val="accent2">
                     <a:lumMod val="75000"/>
@@ -41428,9 +41544,19 @@
                 <a:uFillTx/>
                 <a:latin typeface="Calibri"/>
               </a:rPr>
-              <a:t>Diagram stanów do obiektu klasy xxx</a:t>
-            </a:r>
-            <a:endParaRPr lang="en-GB" sz="2400" b="0" u="none" strike="noStrike">
+              <a:t>Diagram klas projektowych</a:t>
+            </a:r>
+            <a:r>
+              <a:rPr lang="pl-PL" sz="2400" dirty="0">
+                <a:solidFill>
+                  <a:schemeClr val="accent2">
+                    <a:lumMod val="75000"/>
+                  </a:schemeClr>
+                </a:solidFill>
+              </a:rPr>
+              <a:t> Logika Aplikacji – Zarządzanie systemem</a:t>
+            </a:r>
+            <a:endParaRPr lang="en-GB" sz="2400" b="0" u="none" strike="noStrike" dirty="0">
               <a:solidFill>
                 <a:schemeClr val="lt1"/>
               </a:solidFill>
@@ -41441,7 +41567,42 @@
           </a:p>
         </p:txBody>
       </p:sp>
+      <p:pic>
+        <p:nvPicPr>
+          <p:cNvPr id="3" name="Picture 2">
+            <a:extLst>
+              <a:ext uri="{FF2B5EF4-FFF2-40B4-BE49-F238E27FC236}">
+                <a16:creationId xmlns:a16="http://schemas.microsoft.com/office/drawing/2014/main" id="{90C0D816-D33A-2DF4-0955-CCF4E8EFB5A6}"/>
+              </a:ext>
+            </a:extLst>
+          </p:cNvPr>
+          <p:cNvPicPr>
+            <a:picLocks noChangeAspect="1"/>
+          </p:cNvPicPr>
+          <p:nvPr/>
+        </p:nvPicPr>
+        <p:blipFill>
+          <a:blip r:embed="rId2"/>
+          <a:stretch>
+            <a:fillRect/>
+          </a:stretch>
+        </p:blipFill>
+        <p:spPr>
+          <a:xfrm>
+            <a:off x="1575969" y="1075996"/>
+            <a:ext cx="5377281" cy="4223175"/>
+          </a:xfrm>
+          <a:prstGeom prst="rect">
+            <a:avLst/>
+          </a:prstGeom>
+        </p:spPr>
+      </p:pic>
     </p:spTree>
+    <p:extLst>
+      <p:ext uri="{BB962C8B-B14F-4D97-AF65-F5344CB8AC3E}">
+        <p14:creationId xmlns:p14="http://schemas.microsoft.com/office/powerpoint/2010/main" val="1487956200"/>
+      </p:ext>
+    </p:extLst>
   </p:cSld>
   <p:clrMapOvr>
     <a:masterClrMapping/>
@@ -41946,7 +42107,13 @@
   <p:cSld>
     <p:spTree>
       <p:nvGrpSpPr>
-        <p:cNvPr id="1" name=""/>
+        <p:cNvPr id="1" name="">
+          <a:extLst>
+            <a:ext uri="{FF2B5EF4-FFF2-40B4-BE49-F238E27FC236}">
+              <a16:creationId xmlns:a16="http://schemas.microsoft.com/office/drawing/2014/main" id="{0BEB3950-DB99-4214-03EF-E9A02633D44C}"/>
+            </a:ext>
+          </a:extLst>
+        </p:cNvPr>
         <p:cNvGrpSpPr/>
         <p:nvPr/>
       </p:nvGrpSpPr>
@@ -41960,7 +42127,13 @@
       </p:grpSpPr>
       <p:sp>
         <p:nvSpPr>
-          <p:cNvPr id="302" name="PlaceHolder 1"/>
+          <p:cNvPr id="299" name="PlaceHolder 1">
+            <a:extLst>
+              <a:ext uri="{FF2B5EF4-FFF2-40B4-BE49-F238E27FC236}">
+                <a16:creationId xmlns:a16="http://schemas.microsoft.com/office/drawing/2014/main" id="{BF8B19E0-95CD-7C13-2B0B-25FC4D17190A}"/>
+              </a:ext>
+            </a:extLst>
+          </p:cNvPr>
           <p:cNvSpPr>
             <a:spLocks noGrp="1"/>
           </p:cNvSpPr>
@@ -41987,14 +42160,13 @@
           </a:bodyPr>
           <a:lstStyle/>
           <a:p>
-            <a:pPr indent="0">
+            <a:pPr>
               <a:lnSpc>
                 <a:spcPct val="100000"/>
               </a:lnSpc>
-              <a:buNone/>
             </a:pPr>
             <a:r>
-              <a:rPr lang="pl-PL" sz="2400" b="0" u="none" strike="noStrike">
+              <a:rPr lang="pl-PL" sz="2400" b="0" u="none" strike="noStrike" dirty="0">
                 <a:solidFill>
                   <a:schemeClr val="accent2">
                     <a:lumMod val="75000"/>
@@ -42004,9 +42176,19 @@
                 <a:uFillTx/>
                 <a:latin typeface="Calibri"/>
               </a:rPr>
-              <a:t>Diagram pakietów: model warstw systemu</a:t>
-            </a:r>
-            <a:endParaRPr lang="en-GB" sz="2400" b="0" u="none" strike="noStrike">
+              <a:t>Diagram klas projektowych</a:t>
+            </a:r>
+            <a:r>
+              <a:rPr lang="pl-PL" sz="2400" dirty="0">
+                <a:solidFill>
+                  <a:schemeClr val="accent2">
+                    <a:lumMod val="75000"/>
+                  </a:schemeClr>
+                </a:solidFill>
+              </a:rPr>
+              <a:t> Logika Aplikacji – Przekształcanie zdjęcia</a:t>
+            </a:r>
+            <a:endParaRPr lang="en-GB" sz="2400" b="0" u="none" strike="noStrike" dirty="0">
               <a:solidFill>
                 <a:schemeClr val="lt1"/>
               </a:solidFill>
@@ -42017,7 +42199,42 @@
           </a:p>
         </p:txBody>
       </p:sp>
+      <p:pic>
+        <p:nvPicPr>
+          <p:cNvPr id="4" name="Picture 3">
+            <a:extLst>
+              <a:ext uri="{FF2B5EF4-FFF2-40B4-BE49-F238E27FC236}">
+                <a16:creationId xmlns:a16="http://schemas.microsoft.com/office/drawing/2014/main" id="{BF1E2D3D-AB13-2100-969A-E893844FBBFB}"/>
+              </a:ext>
+            </a:extLst>
+          </p:cNvPr>
+          <p:cNvPicPr>
+            <a:picLocks noChangeAspect="1"/>
+          </p:cNvPicPr>
+          <p:nvPr/>
+        </p:nvPicPr>
+        <p:blipFill>
+          <a:blip r:embed="rId2"/>
+          <a:stretch>
+            <a:fillRect/>
+          </a:stretch>
+        </p:blipFill>
+        <p:spPr>
+          <a:xfrm>
+            <a:off x="1390206" y="1090286"/>
+            <a:ext cx="6363588" cy="4677428"/>
+          </a:xfrm>
+          <a:prstGeom prst="rect">
+            <a:avLst/>
+          </a:prstGeom>
+        </p:spPr>
+      </p:pic>
     </p:spTree>
+    <p:extLst>
+      <p:ext uri="{BB962C8B-B14F-4D97-AF65-F5344CB8AC3E}">
+        <p14:creationId xmlns:p14="http://schemas.microsoft.com/office/powerpoint/2010/main" val="1441734699"/>
+      </p:ext>
+    </p:extLst>
   </p:cSld>
   <p:clrMapOvr>
     <a:masterClrMapping/>
@@ -42030,7 +42247,13 @@
   <p:cSld>
     <p:spTree>
       <p:nvGrpSpPr>
-        <p:cNvPr id="1" name=""/>
+        <p:cNvPr id="1" name="">
+          <a:extLst>
+            <a:ext uri="{FF2B5EF4-FFF2-40B4-BE49-F238E27FC236}">
+              <a16:creationId xmlns:a16="http://schemas.microsoft.com/office/drawing/2014/main" id="{C6672414-3670-766F-5157-56D90E32EE7F}"/>
+            </a:ext>
+          </a:extLst>
+        </p:cNvPr>
         <p:cNvGrpSpPr/>
         <p:nvPr/>
       </p:nvGrpSpPr>
@@ -42044,7 +42267,13 @@
       </p:grpSpPr>
       <p:sp>
         <p:nvSpPr>
-          <p:cNvPr id="303" name="PlaceHolder 1"/>
+          <p:cNvPr id="299" name="PlaceHolder 1">
+            <a:extLst>
+              <a:ext uri="{FF2B5EF4-FFF2-40B4-BE49-F238E27FC236}">
+                <a16:creationId xmlns:a16="http://schemas.microsoft.com/office/drawing/2014/main" id="{2AA999C1-E546-262D-ED92-8A57B3C4356E}"/>
+              </a:ext>
+            </a:extLst>
+          </p:cNvPr>
           <p:cNvSpPr>
             <a:spLocks noGrp="1"/>
           </p:cNvSpPr>
@@ -42071,14 +42300,13 @@
           </a:bodyPr>
           <a:lstStyle/>
           <a:p>
-            <a:pPr indent="0">
+            <a:pPr>
               <a:lnSpc>
                 <a:spcPct val="100000"/>
               </a:lnSpc>
-              <a:buNone/>
             </a:pPr>
             <a:r>
-              <a:rPr lang="pl-PL" sz="2400" b="0" u="none" strike="noStrike">
+              <a:rPr lang="pl-PL" sz="2400" b="0" u="none" strike="noStrike" dirty="0">
                 <a:solidFill>
                   <a:schemeClr val="accent2">
                     <a:lumMod val="75000"/>
@@ -42088,9 +42316,39 @@
                 <a:uFillTx/>
                 <a:latin typeface="Calibri"/>
               </a:rPr>
-              <a:t>Diagram komponentów systemu</a:t>
-            </a:r>
-            <a:endParaRPr lang="en-GB" sz="2400" b="0" u="none" strike="noStrike">
+              <a:t>Diagram klas projektowych</a:t>
+            </a:r>
+            <a:r>
+              <a:rPr lang="pl-PL" sz="2400" dirty="0">
+                <a:solidFill>
+                  <a:schemeClr val="accent2">
+                    <a:lumMod val="75000"/>
+                  </a:schemeClr>
+                </a:solidFill>
+              </a:rPr>
+              <a:t> Dane </a:t>
+            </a:r>
+            <a:r>
+              <a:rPr lang="pl-PL" sz="2400" dirty="0" err="1">
+                <a:solidFill>
+                  <a:schemeClr val="accent2">
+                    <a:lumMod val="75000"/>
+                  </a:schemeClr>
+                </a:solidFill>
+              </a:rPr>
+              <a:t>Adminisrtacja</a:t>
+            </a:r>
+            <a:r>
+              <a:rPr lang="pl-PL" sz="2400" dirty="0">
+                <a:solidFill>
+                  <a:schemeClr val="accent2">
+                    <a:lumMod val="75000"/>
+                  </a:schemeClr>
+                </a:solidFill>
+              </a:rPr>
+              <a:t> Systemem</a:t>
+            </a:r>
+            <a:endParaRPr lang="en-GB" sz="2400" b="0" u="none" strike="noStrike" dirty="0">
               <a:solidFill>
                 <a:schemeClr val="lt1"/>
               </a:solidFill>
@@ -42101,7 +42359,42 @@
           </a:p>
         </p:txBody>
       </p:sp>
+      <p:pic>
+        <p:nvPicPr>
+          <p:cNvPr id="3" name="Picture 2">
+            <a:extLst>
+              <a:ext uri="{FF2B5EF4-FFF2-40B4-BE49-F238E27FC236}">
+                <a16:creationId xmlns:a16="http://schemas.microsoft.com/office/drawing/2014/main" id="{8C62DE3A-09A1-5804-C1D5-702E3B406591}"/>
+              </a:ext>
+            </a:extLst>
+          </p:cNvPr>
+          <p:cNvPicPr>
+            <a:picLocks noChangeAspect="1"/>
+          </p:cNvPicPr>
+          <p:nvPr/>
+        </p:nvPicPr>
+        <p:blipFill>
+          <a:blip r:embed="rId2"/>
+          <a:stretch>
+            <a:fillRect/>
+          </a:stretch>
+        </p:blipFill>
+        <p:spPr>
+          <a:xfrm>
+            <a:off x="1013642" y="1485899"/>
+            <a:ext cx="7129918" cy="4672783"/>
+          </a:xfrm>
+          <a:prstGeom prst="rect">
+            <a:avLst/>
+          </a:prstGeom>
+        </p:spPr>
+      </p:pic>
     </p:spTree>
+    <p:extLst>
+      <p:ext uri="{BB962C8B-B14F-4D97-AF65-F5344CB8AC3E}">
+        <p14:creationId xmlns:p14="http://schemas.microsoft.com/office/powerpoint/2010/main" val="1978251238"/>
+      </p:ext>
+    </p:extLst>
   </p:cSld>
   <p:clrMapOvr>
     <a:masterClrMapping/>
@@ -42114,7 +42407,13 @@
   <p:cSld>
     <p:spTree>
       <p:nvGrpSpPr>
-        <p:cNvPr id="1" name=""/>
+        <p:cNvPr id="1" name="">
+          <a:extLst>
+            <a:ext uri="{FF2B5EF4-FFF2-40B4-BE49-F238E27FC236}">
+              <a16:creationId xmlns:a16="http://schemas.microsoft.com/office/drawing/2014/main" id="{DDE59E49-64A3-D61A-391E-BC59F854D6E5}"/>
+            </a:ext>
+          </a:extLst>
+        </p:cNvPr>
         <p:cNvGrpSpPr/>
         <p:nvPr/>
       </p:nvGrpSpPr>
@@ -42128,7 +42427,13 @@
       </p:grpSpPr>
       <p:sp>
         <p:nvSpPr>
-          <p:cNvPr id="304" name="PlaceHolder 1"/>
+          <p:cNvPr id="299" name="PlaceHolder 1">
+            <a:extLst>
+              <a:ext uri="{FF2B5EF4-FFF2-40B4-BE49-F238E27FC236}">
+                <a16:creationId xmlns:a16="http://schemas.microsoft.com/office/drawing/2014/main" id="{DF45C043-223F-04E3-3873-1D83642B18F5}"/>
+              </a:ext>
+            </a:extLst>
+          </p:cNvPr>
           <p:cNvSpPr>
             <a:spLocks noGrp="1"/>
           </p:cNvSpPr>
@@ -42155,14 +42460,13 @@
           </a:bodyPr>
           <a:lstStyle/>
           <a:p>
-            <a:pPr indent="0">
+            <a:pPr>
               <a:lnSpc>
                 <a:spcPct val="100000"/>
               </a:lnSpc>
-              <a:buNone/>
             </a:pPr>
             <a:r>
-              <a:rPr lang="pl-PL" sz="2400" b="0" u="none" strike="noStrike">
+              <a:rPr lang="pl-PL" sz="2400" b="0" u="none" strike="noStrike" dirty="0">
                 <a:solidFill>
                   <a:schemeClr val="accent2">
                     <a:lumMod val="75000"/>
@@ -42172,9 +42476,19 @@
                 <a:uFillTx/>
                 <a:latin typeface="Calibri"/>
               </a:rPr>
-              <a:t>Diagram wdrożenia systemu</a:t>
-            </a:r>
-            <a:endParaRPr lang="en-GB" sz="2400" b="0" u="none" strike="noStrike">
+              <a:t>Diagram klas projektowych</a:t>
+            </a:r>
+            <a:r>
+              <a:rPr lang="pl-PL" sz="2400" dirty="0">
+                <a:solidFill>
+                  <a:schemeClr val="accent2">
+                    <a:lumMod val="75000"/>
+                  </a:schemeClr>
+                </a:solidFill>
+              </a:rPr>
+              <a:t> Dane Przekształcanie notatki</a:t>
+            </a:r>
+            <a:endParaRPr lang="en-GB" sz="2400" b="0" u="none" strike="noStrike" dirty="0">
               <a:solidFill>
                 <a:schemeClr val="lt1"/>
               </a:solidFill>
@@ -42185,7 +42499,42 @@
           </a:p>
         </p:txBody>
       </p:sp>
+      <p:pic>
+        <p:nvPicPr>
+          <p:cNvPr id="3" name="Picture 2">
+            <a:extLst>
+              <a:ext uri="{FF2B5EF4-FFF2-40B4-BE49-F238E27FC236}">
+                <a16:creationId xmlns:a16="http://schemas.microsoft.com/office/drawing/2014/main" id="{617A89AC-C1E5-2368-01A6-0B8386D39A6D}"/>
+              </a:ext>
+            </a:extLst>
+          </p:cNvPr>
+          <p:cNvPicPr>
+            <a:picLocks noChangeAspect="1"/>
+          </p:cNvPicPr>
+          <p:nvPr/>
+        </p:nvPicPr>
+        <p:blipFill>
+          <a:blip r:embed="rId2"/>
+          <a:stretch>
+            <a:fillRect/>
+          </a:stretch>
+        </p:blipFill>
+        <p:spPr>
+          <a:xfrm>
+            <a:off x="1187450" y="1735304"/>
+            <a:ext cx="6572250" cy="4438327"/>
+          </a:xfrm>
+          <a:prstGeom prst="rect">
+            <a:avLst/>
+          </a:prstGeom>
+        </p:spPr>
+      </p:pic>
     </p:spTree>
+    <p:extLst>
+      <p:ext uri="{BB962C8B-B14F-4D97-AF65-F5344CB8AC3E}">
+        <p14:creationId xmlns:p14="http://schemas.microsoft.com/office/powerpoint/2010/main" val="3655842469"/>
+      </p:ext>
+    </p:extLst>
   </p:cSld>
   <p:clrMapOvr>
     <a:masterClrMapping/>
@@ -42212,7 +42561,7 @@
       </p:grpSpPr>
       <p:sp>
         <p:nvSpPr>
-          <p:cNvPr id="305" name="PlaceHolder 1"/>
+          <p:cNvPr id="300" name="PlaceHolder 1"/>
           <p:cNvSpPr>
             <a:spLocks noGrp="1"/>
           </p:cNvSpPr>
@@ -42256,7 +42605,956 @@
                 <a:uFillTx/>
                 <a:latin typeface="Calibri"/>
               </a:rPr>
-              <a:t>Kod systemu: jako wynik transformacji</a:t>
+              <a:t>Opis klas projektowych</a:t>
+            </a:r>
+            <a:endParaRPr lang="en-GB" sz="2400" b="0" u="none" strike="noStrike">
+              <a:solidFill>
+                <a:schemeClr val="lt1"/>
+              </a:solidFill>
+              <a:effectLst/>
+              <a:uFillTx/>
+              <a:latin typeface="Times New Roman"/>
+            </a:endParaRPr>
+          </a:p>
+        </p:txBody>
+      </p:sp>
+      <p:pic>
+        <p:nvPicPr>
+          <p:cNvPr id="5" name="Picture 4">
+            <a:extLst>
+              <a:ext uri="{FF2B5EF4-FFF2-40B4-BE49-F238E27FC236}">
+                <a16:creationId xmlns:a16="http://schemas.microsoft.com/office/drawing/2014/main" id="{D26D5063-B7A3-44E6-E574-B7E50B5B8C8D}"/>
+              </a:ext>
+            </a:extLst>
+          </p:cNvPr>
+          <p:cNvPicPr>
+            <a:picLocks noChangeAspect="1"/>
+          </p:cNvPicPr>
+          <p:nvPr/>
+        </p:nvPicPr>
+        <p:blipFill>
+          <a:blip r:embed="rId2"/>
+          <a:stretch>
+            <a:fillRect/>
+          </a:stretch>
+        </p:blipFill>
+        <p:spPr>
+          <a:xfrm>
+            <a:off x="1460050" y="1080887"/>
+            <a:ext cx="5679447" cy="2528866"/>
+          </a:xfrm>
+          <a:prstGeom prst="rect">
+            <a:avLst/>
+          </a:prstGeom>
+        </p:spPr>
+      </p:pic>
+      <p:pic>
+        <p:nvPicPr>
+          <p:cNvPr id="7" name="Picture 6">
+            <a:extLst>
+              <a:ext uri="{FF2B5EF4-FFF2-40B4-BE49-F238E27FC236}">
+                <a16:creationId xmlns:a16="http://schemas.microsoft.com/office/drawing/2014/main" id="{5C62A7F8-4F9B-7A2F-9577-8F5A2B184713}"/>
+              </a:ext>
+            </a:extLst>
+          </p:cNvPr>
+          <p:cNvPicPr>
+            <a:picLocks noChangeAspect="1"/>
+          </p:cNvPicPr>
+          <p:nvPr/>
+        </p:nvPicPr>
+        <p:blipFill>
+          <a:blip r:embed="rId3"/>
+          <a:stretch>
+            <a:fillRect/>
+          </a:stretch>
+        </p:blipFill>
+        <p:spPr>
+          <a:xfrm>
+            <a:off x="1460050" y="3609753"/>
+            <a:ext cx="5679447" cy="2861139"/>
+          </a:xfrm>
+          <a:prstGeom prst="rect">
+            <a:avLst/>
+          </a:prstGeom>
+        </p:spPr>
+      </p:pic>
+    </p:spTree>
+  </p:cSld>
+  <p:clrMapOvr>
+    <a:masterClrMapping/>
+  </p:clrMapOvr>
+</p:sld>
+</file>
+
+<file path=ppt/slides/slide54.xml><?xml version="1.0" encoding="utf-8"?>
+<p:sld xmlns:a="http://schemas.openxmlformats.org/drawingml/2006/main" xmlns:r="http://schemas.openxmlformats.org/officeDocument/2006/relationships" xmlns:p="http://schemas.openxmlformats.org/presentationml/2006/main">
+  <p:cSld>
+    <p:spTree>
+      <p:nvGrpSpPr>
+        <p:cNvPr id="1" name="">
+          <a:extLst>
+            <a:ext uri="{FF2B5EF4-FFF2-40B4-BE49-F238E27FC236}">
+              <a16:creationId xmlns:a16="http://schemas.microsoft.com/office/drawing/2014/main" id="{38D75161-1069-5EF1-C559-16F8B09F838A}"/>
+            </a:ext>
+          </a:extLst>
+        </p:cNvPr>
+        <p:cNvGrpSpPr/>
+        <p:nvPr/>
+      </p:nvGrpSpPr>
+      <p:grpSpPr>
+        <a:xfrm>
+          <a:off x="0" y="0"/>
+          <a:ext cx="0" cy="0"/>
+          <a:chOff x="0" y="0"/>
+          <a:chExt cx="0" cy="0"/>
+        </a:xfrm>
+      </p:grpSpPr>
+      <p:sp>
+        <p:nvSpPr>
+          <p:cNvPr id="300" name="PlaceHolder 1">
+            <a:extLst>
+              <a:ext uri="{FF2B5EF4-FFF2-40B4-BE49-F238E27FC236}">
+                <a16:creationId xmlns:a16="http://schemas.microsoft.com/office/drawing/2014/main" id="{83AABBAF-F98E-4335-71DB-FC9D58C60C55}"/>
+              </a:ext>
+            </a:extLst>
+          </p:cNvPr>
+          <p:cNvSpPr>
+            <a:spLocks noGrp="1"/>
+          </p:cNvSpPr>
+          <p:nvPr>
+            <p:ph type="title"/>
+          </p:nvPr>
+        </p:nvSpPr>
+        <p:spPr>
+          <a:xfrm>
+            <a:off x="785880" y="428760"/>
+            <a:ext cx="7357680" cy="502920"/>
+          </a:xfrm>
+          <a:prstGeom prst="rect">
+            <a:avLst/>
+          </a:prstGeom>
+          <a:noFill/>
+          <a:ln w="0">
+            <a:noFill/>
+          </a:ln>
+        </p:spPr>
+        <p:txBody>
+          <a:bodyPr lIns="0" tIns="45720" rIns="0" bIns="0" numCol="1" spcCol="0" anchor="b">
+            <a:noAutofit/>
+          </a:bodyPr>
+          <a:lstStyle/>
+          <a:p>
+            <a:pPr indent="0">
+              <a:lnSpc>
+                <a:spcPct val="100000"/>
+              </a:lnSpc>
+              <a:buNone/>
+            </a:pPr>
+            <a:r>
+              <a:rPr lang="pl-PL" sz="2400" b="0" u="none" strike="noStrike" dirty="0">
+                <a:solidFill>
+                  <a:schemeClr val="accent2">
+                    <a:lumMod val="75000"/>
+                  </a:schemeClr>
+                </a:solidFill>
+                <a:effectLst/>
+                <a:uFillTx/>
+                <a:latin typeface="Calibri"/>
+              </a:rPr>
+              <a:t>Opis klas projektowych cd.</a:t>
+            </a:r>
+            <a:endParaRPr lang="en-GB" sz="2400" b="0" u="none" strike="noStrike" dirty="0">
+              <a:solidFill>
+                <a:schemeClr val="lt1"/>
+              </a:solidFill>
+              <a:effectLst/>
+              <a:uFillTx/>
+              <a:latin typeface="Times New Roman"/>
+            </a:endParaRPr>
+          </a:p>
+        </p:txBody>
+      </p:sp>
+      <p:pic>
+        <p:nvPicPr>
+          <p:cNvPr id="3" name="Picture 2">
+            <a:extLst>
+              <a:ext uri="{FF2B5EF4-FFF2-40B4-BE49-F238E27FC236}">
+                <a16:creationId xmlns:a16="http://schemas.microsoft.com/office/drawing/2014/main" id="{BFF9CECB-A490-25A2-7627-34464D1E039D}"/>
+              </a:ext>
+            </a:extLst>
+          </p:cNvPr>
+          <p:cNvPicPr>
+            <a:picLocks noChangeAspect="1"/>
+          </p:cNvPicPr>
+          <p:nvPr/>
+        </p:nvPicPr>
+        <p:blipFill>
+          <a:blip r:embed="rId2"/>
+          <a:stretch>
+            <a:fillRect/>
+          </a:stretch>
+        </p:blipFill>
+        <p:spPr>
+          <a:xfrm>
+            <a:off x="1318758" y="1117491"/>
+            <a:ext cx="6506483" cy="1562318"/>
+          </a:xfrm>
+          <a:prstGeom prst="rect">
+            <a:avLst/>
+          </a:prstGeom>
+        </p:spPr>
+      </p:pic>
+      <p:pic>
+        <p:nvPicPr>
+          <p:cNvPr id="6" name="Picture 5">
+            <a:extLst>
+              <a:ext uri="{FF2B5EF4-FFF2-40B4-BE49-F238E27FC236}">
+                <a16:creationId xmlns:a16="http://schemas.microsoft.com/office/drawing/2014/main" id="{51BA3146-8AA2-3CB5-A3A8-9D9BBC008ED6}"/>
+              </a:ext>
+            </a:extLst>
+          </p:cNvPr>
+          <p:cNvPicPr>
+            <a:picLocks noChangeAspect="1"/>
+          </p:cNvPicPr>
+          <p:nvPr/>
+        </p:nvPicPr>
+        <p:blipFill>
+          <a:blip r:embed="rId3"/>
+          <a:stretch>
+            <a:fillRect/>
+          </a:stretch>
+        </p:blipFill>
+        <p:spPr>
+          <a:xfrm>
+            <a:off x="1318758" y="2679809"/>
+            <a:ext cx="6506483" cy="2523498"/>
+          </a:xfrm>
+          <a:prstGeom prst="rect">
+            <a:avLst/>
+          </a:prstGeom>
+        </p:spPr>
+      </p:pic>
+    </p:spTree>
+    <p:extLst>
+      <p:ext uri="{BB962C8B-B14F-4D97-AF65-F5344CB8AC3E}">
+        <p14:creationId xmlns:p14="http://schemas.microsoft.com/office/powerpoint/2010/main" val="3652675530"/>
+      </p:ext>
+    </p:extLst>
+  </p:cSld>
+  <p:clrMapOvr>
+    <a:masterClrMapping/>
+  </p:clrMapOvr>
+</p:sld>
+</file>
+
+<file path=ppt/slides/slide55.xml><?xml version="1.0" encoding="utf-8"?>
+<p:sld xmlns:a="http://schemas.openxmlformats.org/drawingml/2006/main" xmlns:r="http://schemas.openxmlformats.org/officeDocument/2006/relationships" xmlns:p="http://schemas.openxmlformats.org/presentationml/2006/main">
+  <p:cSld>
+    <p:spTree>
+      <p:nvGrpSpPr>
+        <p:cNvPr id="1" name="">
+          <a:extLst>
+            <a:ext uri="{FF2B5EF4-FFF2-40B4-BE49-F238E27FC236}">
+              <a16:creationId xmlns:a16="http://schemas.microsoft.com/office/drawing/2014/main" id="{9F6EEF24-6049-4335-FCBE-66E21BA9050C}"/>
+            </a:ext>
+          </a:extLst>
+        </p:cNvPr>
+        <p:cNvGrpSpPr/>
+        <p:nvPr/>
+      </p:nvGrpSpPr>
+      <p:grpSpPr>
+        <a:xfrm>
+          <a:off x="0" y="0"/>
+          <a:ext cx="0" cy="0"/>
+          <a:chOff x="0" y="0"/>
+          <a:chExt cx="0" cy="0"/>
+        </a:xfrm>
+      </p:grpSpPr>
+      <p:sp>
+        <p:nvSpPr>
+          <p:cNvPr id="300" name="PlaceHolder 1">
+            <a:extLst>
+              <a:ext uri="{FF2B5EF4-FFF2-40B4-BE49-F238E27FC236}">
+                <a16:creationId xmlns:a16="http://schemas.microsoft.com/office/drawing/2014/main" id="{8F17DF49-F100-EA65-3BF0-90E312A31365}"/>
+              </a:ext>
+            </a:extLst>
+          </p:cNvPr>
+          <p:cNvSpPr>
+            <a:spLocks noGrp="1"/>
+          </p:cNvSpPr>
+          <p:nvPr>
+            <p:ph type="title"/>
+          </p:nvPr>
+        </p:nvSpPr>
+        <p:spPr>
+          <a:xfrm>
+            <a:off x="785880" y="428760"/>
+            <a:ext cx="7357680" cy="502920"/>
+          </a:xfrm>
+          <a:prstGeom prst="rect">
+            <a:avLst/>
+          </a:prstGeom>
+          <a:noFill/>
+          <a:ln w="0">
+            <a:noFill/>
+          </a:ln>
+        </p:spPr>
+        <p:txBody>
+          <a:bodyPr lIns="0" tIns="45720" rIns="0" bIns="0" numCol="1" spcCol="0" anchor="b">
+            <a:noAutofit/>
+          </a:bodyPr>
+          <a:lstStyle/>
+          <a:p>
+            <a:pPr indent="0">
+              <a:lnSpc>
+                <a:spcPct val="100000"/>
+              </a:lnSpc>
+              <a:buNone/>
+            </a:pPr>
+            <a:r>
+              <a:rPr lang="pl-PL" sz="2400" b="0" u="none" strike="noStrike" dirty="0">
+                <a:solidFill>
+                  <a:schemeClr val="accent2">
+                    <a:lumMod val="75000"/>
+                  </a:schemeClr>
+                </a:solidFill>
+                <a:effectLst/>
+                <a:uFillTx/>
+                <a:latin typeface="Calibri"/>
+              </a:rPr>
+              <a:t>Opis klas projektowych cd.</a:t>
+            </a:r>
+            <a:endParaRPr lang="en-GB" sz="2400" b="0" u="none" strike="noStrike" dirty="0">
+              <a:solidFill>
+                <a:schemeClr val="lt1"/>
+              </a:solidFill>
+              <a:effectLst/>
+              <a:uFillTx/>
+              <a:latin typeface="Times New Roman"/>
+            </a:endParaRPr>
+          </a:p>
+        </p:txBody>
+      </p:sp>
+      <p:pic>
+        <p:nvPicPr>
+          <p:cNvPr id="4" name="Picture 3">
+            <a:extLst>
+              <a:ext uri="{FF2B5EF4-FFF2-40B4-BE49-F238E27FC236}">
+                <a16:creationId xmlns:a16="http://schemas.microsoft.com/office/drawing/2014/main" id="{D6A15D02-701F-045F-60BA-7D101ACA52C2}"/>
+              </a:ext>
+            </a:extLst>
+          </p:cNvPr>
+          <p:cNvPicPr>
+            <a:picLocks noChangeAspect="1"/>
+          </p:cNvPicPr>
+          <p:nvPr/>
+        </p:nvPicPr>
+        <p:blipFill>
+          <a:blip r:embed="rId2"/>
+          <a:stretch>
+            <a:fillRect/>
+          </a:stretch>
+        </p:blipFill>
+        <p:spPr>
+          <a:xfrm>
+            <a:off x="1254347" y="1061885"/>
+            <a:ext cx="6420746" cy="2181529"/>
+          </a:xfrm>
+          <a:prstGeom prst="rect">
+            <a:avLst/>
+          </a:prstGeom>
+        </p:spPr>
+      </p:pic>
+      <p:pic>
+        <p:nvPicPr>
+          <p:cNvPr id="7" name="Picture 6">
+            <a:extLst>
+              <a:ext uri="{FF2B5EF4-FFF2-40B4-BE49-F238E27FC236}">
+                <a16:creationId xmlns:a16="http://schemas.microsoft.com/office/drawing/2014/main" id="{00C8927D-7071-7C5D-6F0C-E7C813307D0D}"/>
+              </a:ext>
+            </a:extLst>
+          </p:cNvPr>
+          <p:cNvPicPr>
+            <a:picLocks noChangeAspect="1"/>
+          </p:cNvPicPr>
+          <p:nvPr/>
+        </p:nvPicPr>
+        <p:blipFill>
+          <a:blip r:embed="rId3"/>
+          <a:stretch>
+            <a:fillRect/>
+          </a:stretch>
+        </p:blipFill>
+        <p:spPr>
+          <a:xfrm>
+            <a:off x="1312161" y="3243414"/>
+            <a:ext cx="6305118" cy="2312836"/>
+          </a:xfrm>
+          <a:prstGeom prst="rect">
+            <a:avLst/>
+          </a:prstGeom>
+        </p:spPr>
+      </p:pic>
+    </p:spTree>
+    <p:extLst>
+      <p:ext uri="{BB962C8B-B14F-4D97-AF65-F5344CB8AC3E}">
+        <p14:creationId xmlns:p14="http://schemas.microsoft.com/office/powerpoint/2010/main" val="2499866933"/>
+      </p:ext>
+    </p:extLst>
+  </p:cSld>
+  <p:clrMapOvr>
+    <a:masterClrMapping/>
+  </p:clrMapOvr>
+</p:sld>
+</file>
+
+<file path=ppt/slides/slide56.xml><?xml version="1.0" encoding="utf-8"?>
+<p:sld xmlns:a="http://schemas.openxmlformats.org/drawingml/2006/main" xmlns:r="http://schemas.openxmlformats.org/officeDocument/2006/relationships" xmlns:p="http://schemas.openxmlformats.org/presentationml/2006/main">
+  <p:cSld>
+    <p:spTree>
+      <p:nvGrpSpPr>
+        <p:cNvPr id="1" name="">
+          <a:extLst>
+            <a:ext uri="{FF2B5EF4-FFF2-40B4-BE49-F238E27FC236}">
+              <a16:creationId xmlns:a16="http://schemas.microsoft.com/office/drawing/2014/main" id="{AFDC4CDC-8457-588B-F670-865C27465F2D}"/>
+            </a:ext>
+          </a:extLst>
+        </p:cNvPr>
+        <p:cNvGrpSpPr/>
+        <p:nvPr/>
+      </p:nvGrpSpPr>
+      <p:grpSpPr>
+        <a:xfrm>
+          <a:off x="0" y="0"/>
+          <a:ext cx="0" cy="0"/>
+          <a:chOff x="0" y="0"/>
+          <a:chExt cx="0" cy="0"/>
+        </a:xfrm>
+      </p:grpSpPr>
+      <p:sp>
+        <p:nvSpPr>
+          <p:cNvPr id="300" name="PlaceHolder 1">
+            <a:extLst>
+              <a:ext uri="{FF2B5EF4-FFF2-40B4-BE49-F238E27FC236}">
+                <a16:creationId xmlns:a16="http://schemas.microsoft.com/office/drawing/2014/main" id="{976EAD2D-4A9F-5057-535C-2A91667C1E7B}"/>
+              </a:ext>
+            </a:extLst>
+          </p:cNvPr>
+          <p:cNvSpPr>
+            <a:spLocks noGrp="1"/>
+          </p:cNvSpPr>
+          <p:nvPr>
+            <p:ph type="title"/>
+          </p:nvPr>
+        </p:nvSpPr>
+        <p:spPr>
+          <a:xfrm>
+            <a:off x="785880" y="428760"/>
+            <a:ext cx="7357680" cy="502920"/>
+          </a:xfrm>
+          <a:prstGeom prst="rect">
+            <a:avLst/>
+          </a:prstGeom>
+          <a:noFill/>
+          <a:ln w="0">
+            <a:noFill/>
+          </a:ln>
+        </p:spPr>
+        <p:txBody>
+          <a:bodyPr lIns="0" tIns="45720" rIns="0" bIns="0" numCol="1" spcCol="0" anchor="b">
+            <a:noAutofit/>
+          </a:bodyPr>
+          <a:lstStyle/>
+          <a:p>
+            <a:pPr indent="0">
+              <a:lnSpc>
+                <a:spcPct val="100000"/>
+              </a:lnSpc>
+              <a:buNone/>
+            </a:pPr>
+            <a:r>
+              <a:rPr lang="pl-PL" sz="2400" b="0" u="none" strike="noStrike" dirty="0">
+                <a:solidFill>
+                  <a:schemeClr val="accent2">
+                    <a:lumMod val="75000"/>
+                  </a:schemeClr>
+                </a:solidFill>
+                <a:effectLst/>
+                <a:uFillTx/>
+                <a:latin typeface="Calibri"/>
+              </a:rPr>
+              <a:t>Opis klas projektowych cd.</a:t>
+            </a:r>
+            <a:endParaRPr lang="en-GB" sz="2400" b="0" u="none" strike="noStrike" dirty="0">
+              <a:solidFill>
+                <a:schemeClr val="lt1"/>
+              </a:solidFill>
+              <a:effectLst/>
+              <a:uFillTx/>
+              <a:latin typeface="Times New Roman"/>
+            </a:endParaRPr>
+          </a:p>
+        </p:txBody>
+      </p:sp>
+      <p:pic>
+        <p:nvPicPr>
+          <p:cNvPr id="3" name="Picture 2">
+            <a:extLst>
+              <a:ext uri="{FF2B5EF4-FFF2-40B4-BE49-F238E27FC236}">
+                <a16:creationId xmlns:a16="http://schemas.microsoft.com/office/drawing/2014/main" id="{4E8A19F3-285D-236E-D680-B764254CF2A0}"/>
+              </a:ext>
+            </a:extLst>
+          </p:cNvPr>
+          <p:cNvPicPr>
+            <a:picLocks noChangeAspect="1"/>
+          </p:cNvPicPr>
+          <p:nvPr/>
+        </p:nvPicPr>
+        <p:blipFill>
+          <a:blip r:embed="rId2"/>
+          <a:stretch>
+            <a:fillRect/>
+          </a:stretch>
+        </p:blipFill>
+        <p:spPr>
+          <a:xfrm>
+            <a:off x="1309232" y="1069747"/>
+            <a:ext cx="6525536" cy="3258005"/>
+          </a:xfrm>
+          <a:prstGeom prst="rect">
+            <a:avLst/>
+          </a:prstGeom>
+        </p:spPr>
+      </p:pic>
+      <p:pic>
+        <p:nvPicPr>
+          <p:cNvPr id="6" name="Picture 5">
+            <a:extLst>
+              <a:ext uri="{FF2B5EF4-FFF2-40B4-BE49-F238E27FC236}">
+                <a16:creationId xmlns:a16="http://schemas.microsoft.com/office/drawing/2014/main" id="{16674EA6-0782-1FA8-FCAA-FE931D9B252F}"/>
+              </a:ext>
+            </a:extLst>
+          </p:cNvPr>
+          <p:cNvPicPr>
+            <a:picLocks noChangeAspect="1"/>
+          </p:cNvPicPr>
+          <p:nvPr/>
+        </p:nvPicPr>
+        <p:blipFill>
+          <a:blip r:embed="rId3"/>
+          <a:stretch>
+            <a:fillRect/>
+          </a:stretch>
+        </p:blipFill>
+        <p:spPr>
+          <a:xfrm>
+            <a:off x="1309231" y="4327752"/>
+            <a:ext cx="6529417" cy="1228498"/>
+          </a:xfrm>
+          <a:prstGeom prst="rect">
+            <a:avLst/>
+          </a:prstGeom>
+        </p:spPr>
+      </p:pic>
+    </p:spTree>
+    <p:extLst>
+      <p:ext uri="{BB962C8B-B14F-4D97-AF65-F5344CB8AC3E}">
+        <p14:creationId xmlns:p14="http://schemas.microsoft.com/office/powerpoint/2010/main" val="2397625470"/>
+      </p:ext>
+    </p:extLst>
+  </p:cSld>
+  <p:clrMapOvr>
+    <a:masterClrMapping/>
+  </p:clrMapOvr>
+</p:sld>
+</file>
+
+<file path=ppt/slides/slide57.xml><?xml version="1.0" encoding="utf-8"?>
+<p:sld xmlns:a="http://schemas.openxmlformats.org/drawingml/2006/main" xmlns:r="http://schemas.openxmlformats.org/officeDocument/2006/relationships" xmlns:p="http://schemas.openxmlformats.org/presentationml/2006/main">
+  <p:cSld>
+    <p:spTree>
+      <p:nvGrpSpPr>
+        <p:cNvPr id="1" name="">
+          <a:extLst>
+            <a:ext uri="{FF2B5EF4-FFF2-40B4-BE49-F238E27FC236}">
+              <a16:creationId xmlns:a16="http://schemas.microsoft.com/office/drawing/2014/main" id="{EAF75EB1-2CEC-2F1E-0011-AD5E84049A33}"/>
+            </a:ext>
+          </a:extLst>
+        </p:cNvPr>
+        <p:cNvGrpSpPr/>
+        <p:nvPr/>
+      </p:nvGrpSpPr>
+      <p:grpSpPr>
+        <a:xfrm>
+          <a:off x="0" y="0"/>
+          <a:ext cx="0" cy="0"/>
+          <a:chOff x="0" y="0"/>
+          <a:chExt cx="0" cy="0"/>
+        </a:xfrm>
+      </p:grpSpPr>
+      <p:sp>
+        <p:nvSpPr>
+          <p:cNvPr id="300" name="PlaceHolder 1">
+            <a:extLst>
+              <a:ext uri="{FF2B5EF4-FFF2-40B4-BE49-F238E27FC236}">
+                <a16:creationId xmlns:a16="http://schemas.microsoft.com/office/drawing/2014/main" id="{5BB4B297-657A-6A88-79A7-2AD6EC0DC5A7}"/>
+              </a:ext>
+            </a:extLst>
+          </p:cNvPr>
+          <p:cNvSpPr>
+            <a:spLocks noGrp="1"/>
+          </p:cNvSpPr>
+          <p:nvPr>
+            <p:ph type="title"/>
+          </p:nvPr>
+        </p:nvSpPr>
+        <p:spPr>
+          <a:xfrm>
+            <a:off x="785880" y="428760"/>
+            <a:ext cx="7357680" cy="502920"/>
+          </a:xfrm>
+          <a:prstGeom prst="rect">
+            <a:avLst/>
+          </a:prstGeom>
+          <a:noFill/>
+          <a:ln w="0">
+            <a:noFill/>
+          </a:ln>
+        </p:spPr>
+        <p:txBody>
+          <a:bodyPr lIns="0" tIns="45720" rIns="0" bIns="0" numCol="1" spcCol="0" anchor="b">
+            <a:noAutofit/>
+          </a:bodyPr>
+          <a:lstStyle/>
+          <a:p>
+            <a:pPr indent="0">
+              <a:lnSpc>
+                <a:spcPct val="100000"/>
+              </a:lnSpc>
+              <a:buNone/>
+            </a:pPr>
+            <a:r>
+              <a:rPr lang="pl-PL" sz="2400" b="0" u="none" strike="noStrike" dirty="0">
+                <a:solidFill>
+                  <a:schemeClr val="accent2">
+                    <a:lumMod val="75000"/>
+                  </a:schemeClr>
+                </a:solidFill>
+                <a:effectLst/>
+                <a:uFillTx/>
+                <a:latin typeface="Calibri"/>
+              </a:rPr>
+              <a:t>Opis klas projektowych cd.</a:t>
+            </a:r>
+            <a:endParaRPr lang="en-GB" sz="2400" b="0" u="none" strike="noStrike" dirty="0">
+              <a:solidFill>
+                <a:schemeClr val="lt1"/>
+              </a:solidFill>
+              <a:effectLst/>
+              <a:uFillTx/>
+              <a:latin typeface="Times New Roman"/>
+            </a:endParaRPr>
+          </a:p>
+        </p:txBody>
+      </p:sp>
+      <p:pic>
+        <p:nvPicPr>
+          <p:cNvPr id="4" name="Picture 3">
+            <a:extLst>
+              <a:ext uri="{FF2B5EF4-FFF2-40B4-BE49-F238E27FC236}">
+                <a16:creationId xmlns:a16="http://schemas.microsoft.com/office/drawing/2014/main" id="{DE79FCC7-6062-B892-D4BE-54580DAF80C2}"/>
+              </a:ext>
+            </a:extLst>
+          </p:cNvPr>
+          <p:cNvPicPr>
+            <a:picLocks noChangeAspect="1"/>
+          </p:cNvPicPr>
+          <p:nvPr/>
+        </p:nvPicPr>
+        <p:blipFill>
+          <a:blip r:embed="rId2"/>
+          <a:stretch>
+            <a:fillRect/>
+          </a:stretch>
+        </p:blipFill>
+        <p:spPr>
+          <a:xfrm>
+            <a:off x="1492505" y="1130169"/>
+            <a:ext cx="5944430" cy="1867161"/>
+          </a:xfrm>
+          <a:prstGeom prst="rect">
+            <a:avLst/>
+          </a:prstGeom>
+        </p:spPr>
+      </p:pic>
+      <p:pic>
+        <p:nvPicPr>
+          <p:cNvPr id="7" name="Picture 6">
+            <a:extLst>
+              <a:ext uri="{FF2B5EF4-FFF2-40B4-BE49-F238E27FC236}">
+                <a16:creationId xmlns:a16="http://schemas.microsoft.com/office/drawing/2014/main" id="{F3938FD0-7CF6-B792-A459-36A110A03327}"/>
+              </a:ext>
+            </a:extLst>
+          </p:cNvPr>
+          <p:cNvPicPr>
+            <a:picLocks noChangeAspect="1"/>
+          </p:cNvPicPr>
+          <p:nvPr/>
+        </p:nvPicPr>
+        <p:blipFill>
+          <a:blip r:embed="rId3"/>
+          <a:stretch>
+            <a:fillRect/>
+          </a:stretch>
+        </p:blipFill>
+        <p:spPr>
+          <a:xfrm>
+            <a:off x="1492505" y="3044820"/>
+            <a:ext cx="5947036" cy="3384420"/>
+          </a:xfrm>
+          <a:prstGeom prst="rect">
+            <a:avLst/>
+          </a:prstGeom>
+        </p:spPr>
+      </p:pic>
+    </p:spTree>
+    <p:extLst>
+      <p:ext uri="{BB962C8B-B14F-4D97-AF65-F5344CB8AC3E}">
+        <p14:creationId xmlns:p14="http://schemas.microsoft.com/office/powerpoint/2010/main" val="567061013"/>
+      </p:ext>
+    </p:extLst>
+  </p:cSld>
+  <p:clrMapOvr>
+    <a:masterClrMapping/>
+  </p:clrMapOvr>
+</p:sld>
+</file>
+
+<file path=ppt/slides/slide58.xml><?xml version="1.0" encoding="utf-8"?>
+<p:sld xmlns:a="http://schemas.openxmlformats.org/drawingml/2006/main" xmlns:r="http://schemas.openxmlformats.org/officeDocument/2006/relationships" xmlns:p="http://schemas.openxmlformats.org/presentationml/2006/main">
+  <p:cSld>
+    <p:spTree>
+      <p:nvGrpSpPr>
+        <p:cNvPr id="1" name="">
+          <a:extLst>
+            <a:ext uri="{FF2B5EF4-FFF2-40B4-BE49-F238E27FC236}">
+              <a16:creationId xmlns:a16="http://schemas.microsoft.com/office/drawing/2014/main" id="{CC42225B-437A-4F7F-6817-17B495F6120A}"/>
+            </a:ext>
+          </a:extLst>
+        </p:cNvPr>
+        <p:cNvGrpSpPr/>
+        <p:nvPr/>
+      </p:nvGrpSpPr>
+      <p:grpSpPr>
+        <a:xfrm>
+          <a:off x="0" y="0"/>
+          <a:ext cx="0" cy="0"/>
+          <a:chOff x="0" y="0"/>
+          <a:chExt cx="0" cy="0"/>
+        </a:xfrm>
+      </p:grpSpPr>
+      <p:sp>
+        <p:nvSpPr>
+          <p:cNvPr id="300" name="PlaceHolder 1">
+            <a:extLst>
+              <a:ext uri="{FF2B5EF4-FFF2-40B4-BE49-F238E27FC236}">
+                <a16:creationId xmlns:a16="http://schemas.microsoft.com/office/drawing/2014/main" id="{42A47ECF-6C68-693B-A20C-71849E1FE969}"/>
+              </a:ext>
+            </a:extLst>
+          </p:cNvPr>
+          <p:cNvSpPr>
+            <a:spLocks noGrp="1"/>
+          </p:cNvSpPr>
+          <p:nvPr>
+            <p:ph type="title"/>
+          </p:nvPr>
+        </p:nvSpPr>
+        <p:spPr>
+          <a:xfrm>
+            <a:off x="785880" y="428760"/>
+            <a:ext cx="7357680" cy="502920"/>
+          </a:xfrm>
+          <a:prstGeom prst="rect">
+            <a:avLst/>
+          </a:prstGeom>
+          <a:noFill/>
+          <a:ln w="0">
+            <a:noFill/>
+          </a:ln>
+        </p:spPr>
+        <p:txBody>
+          <a:bodyPr lIns="0" tIns="45720" rIns="0" bIns="0" numCol="1" spcCol="0" anchor="b">
+            <a:noAutofit/>
+          </a:bodyPr>
+          <a:lstStyle/>
+          <a:p>
+            <a:pPr indent="0">
+              <a:lnSpc>
+                <a:spcPct val="100000"/>
+              </a:lnSpc>
+              <a:buNone/>
+            </a:pPr>
+            <a:r>
+              <a:rPr lang="pl-PL" sz="2400" b="0" u="none" strike="noStrike" dirty="0">
+                <a:solidFill>
+                  <a:schemeClr val="accent2">
+                    <a:lumMod val="75000"/>
+                  </a:schemeClr>
+                </a:solidFill>
+                <a:effectLst/>
+                <a:uFillTx/>
+                <a:latin typeface="Calibri"/>
+              </a:rPr>
+              <a:t>Opis klas projektowych cd.</a:t>
+            </a:r>
+            <a:endParaRPr lang="en-GB" sz="2400" b="0" u="none" strike="noStrike" dirty="0">
+              <a:solidFill>
+                <a:schemeClr val="lt1"/>
+              </a:solidFill>
+              <a:effectLst/>
+              <a:uFillTx/>
+              <a:latin typeface="Times New Roman"/>
+            </a:endParaRPr>
+          </a:p>
+        </p:txBody>
+      </p:sp>
+      <p:pic>
+        <p:nvPicPr>
+          <p:cNvPr id="3" name="Picture 2">
+            <a:extLst>
+              <a:ext uri="{FF2B5EF4-FFF2-40B4-BE49-F238E27FC236}">
+                <a16:creationId xmlns:a16="http://schemas.microsoft.com/office/drawing/2014/main" id="{8157E1BB-33C6-622F-F6B1-994B12D0E247}"/>
+              </a:ext>
+            </a:extLst>
+          </p:cNvPr>
+          <p:cNvPicPr>
+            <a:picLocks noChangeAspect="1"/>
+          </p:cNvPicPr>
+          <p:nvPr/>
+        </p:nvPicPr>
+        <p:blipFill>
+          <a:blip r:embed="rId2"/>
+          <a:stretch>
+            <a:fillRect/>
+          </a:stretch>
+        </p:blipFill>
+        <p:spPr>
+          <a:xfrm>
+            <a:off x="1753939" y="1183252"/>
+            <a:ext cx="5409341" cy="751972"/>
+          </a:xfrm>
+          <a:prstGeom prst="rect">
+            <a:avLst/>
+          </a:prstGeom>
+        </p:spPr>
+      </p:pic>
+      <p:pic>
+        <p:nvPicPr>
+          <p:cNvPr id="6" name="Picture 5">
+            <a:extLst>
+              <a:ext uri="{FF2B5EF4-FFF2-40B4-BE49-F238E27FC236}">
+                <a16:creationId xmlns:a16="http://schemas.microsoft.com/office/drawing/2014/main" id="{2FC719F9-E80F-EA5F-23C3-AF6084F7CA42}"/>
+              </a:ext>
+            </a:extLst>
+          </p:cNvPr>
+          <p:cNvPicPr>
+            <a:picLocks noChangeAspect="1"/>
+          </p:cNvPicPr>
+          <p:nvPr/>
+        </p:nvPicPr>
+        <p:blipFill>
+          <a:blip r:embed="rId3"/>
+          <a:stretch>
+            <a:fillRect/>
+          </a:stretch>
+        </p:blipFill>
+        <p:spPr>
+          <a:xfrm>
+            <a:off x="1760049" y="1935224"/>
+            <a:ext cx="5409341" cy="4697798"/>
+          </a:xfrm>
+          <a:prstGeom prst="rect">
+            <a:avLst/>
+          </a:prstGeom>
+        </p:spPr>
+      </p:pic>
+    </p:spTree>
+    <p:extLst>
+      <p:ext uri="{BB962C8B-B14F-4D97-AF65-F5344CB8AC3E}">
+        <p14:creationId xmlns:p14="http://schemas.microsoft.com/office/powerpoint/2010/main" val="3236809589"/>
+      </p:ext>
+    </p:extLst>
+  </p:cSld>
+  <p:clrMapOvr>
+    <a:masterClrMapping/>
+  </p:clrMapOvr>
+</p:sld>
+</file>
+
+<file path=ppt/slides/slide59.xml><?xml version="1.0" encoding="utf-8"?>
+<p:sld xmlns:a="http://schemas.openxmlformats.org/drawingml/2006/main" xmlns:r="http://schemas.openxmlformats.org/officeDocument/2006/relationships" xmlns:p="http://schemas.openxmlformats.org/presentationml/2006/main">
+  <p:cSld>
+    <p:spTree>
+      <p:nvGrpSpPr>
+        <p:cNvPr id="1" name=""/>
+        <p:cNvGrpSpPr/>
+        <p:nvPr/>
+      </p:nvGrpSpPr>
+      <p:grpSpPr>
+        <a:xfrm>
+          <a:off x="0" y="0"/>
+          <a:ext cx="0" cy="0"/>
+          <a:chOff x="0" y="0"/>
+          <a:chExt cx="0" cy="0"/>
+        </a:xfrm>
+      </p:grpSpPr>
+      <p:sp>
+        <p:nvSpPr>
+          <p:cNvPr id="301" name="PlaceHolder 1"/>
+          <p:cNvSpPr>
+            <a:spLocks noGrp="1"/>
+          </p:cNvSpPr>
+          <p:nvPr>
+            <p:ph type="title"/>
+          </p:nvPr>
+        </p:nvSpPr>
+        <p:spPr>
+          <a:xfrm>
+            <a:off x="785880" y="428760"/>
+            <a:ext cx="7357680" cy="502920"/>
+          </a:xfrm>
+          <a:prstGeom prst="rect">
+            <a:avLst/>
+          </a:prstGeom>
+          <a:noFill/>
+          <a:ln w="0">
+            <a:noFill/>
+          </a:ln>
+        </p:spPr>
+        <p:txBody>
+          <a:bodyPr lIns="0" tIns="45720" rIns="0" bIns="0" numCol="1" spcCol="0" anchor="b">
+            <a:noAutofit/>
+          </a:bodyPr>
+          <a:lstStyle/>
+          <a:p>
+            <a:pPr indent="0">
+              <a:lnSpc>
+                <a:spcPct val="100000"/>
+              </a:lnSpc>
+              <a:buNone/>
+            </a:pPr>
+            <a:r>
+              <a:rPr lang="pl-PL" sz="2400" b="0" u="none" strike="noStrike">
+                <a:solidFill>
+                  <a:schemeClr val="accent2">
+                    <a:lumMod val="75000"/>
+                  </a:schemeClr>
+                </a:solidFill>
+                <a:effectLst/>
+                <a:uFillTx/>
+                <a:latin typeface="Calibri"/>
+              </a:rPr>
+              <a:t>Diagram stanów do obiektu klasy xxx</a:t>
             </a:r>
             <a:endParaRPr lang="en-GB" sz="2400" b="0" u="none" strike="noStrike">
               <a:solidFill>
@@ -43562,6 +44860,342 @@
 </p:sld>
 </file>
 
+<file path=ppt/slides/slide60.xml><?xml version="1.0" encoding="utf-8"?>
+<p:sld xmlns:a="http://schemas.openxmlformats.org/drawingml/2006/main" xmlns:r="http://schemas.openxmlformats.org/officeDocument/2006/relationships" xmlns:p="http://schemas.openxmlformats.org/presentationml/2006/main">
+  <p:cSld>
+    <p:spTree>
+      <p:nvGrpSpPr>
+        <p:cNvPr id="1" name=""/>
+        <p:cNvGrpSpPr/>
+        <p:nvPr/>
+      </p:nvGrpSpPr>
+      <p:grpSpPr>
+        <a:xfrm>
+          <a:off x="0" y="0"/>
+          <a:ext cx="0" cy="0"/>
+          <a:chOff x="0" y="0"/>
+          <a:chExt cx="0" cy="0"/>
+        </a:xfrm>
+      </p:grpSpPr>
+      <p:sp>
+        <p:nvSpPr>
+          <p:cNvPr id="302" name="PlaceHolder 1"/>
+          <p:cNvSpPr>
+            <a:spLocks noGrp="1"/>
+          </p:cNvSpPr>
+          <p:nvPr>
+            <p:ph type="title"/>
+          </p:nvPr>
+        </p:nvSpPr>
+        <p:spPr>
+          <a:xfrm>
+            <a:off x="785880" y="428760"/>
+            <a:ext cx="7357680" cy="502920"/>
+          </a:xfrm>
+          <a:prstGeom prst="rect">
+            <a:avLst/>
+          </a:prstGeom>
+          <a:noFill/>
+          <a:ln w="0">
+            <a:noFill/>
+          </a:ln>
+        </p:spPr>
+        <p:txBody>
+          <a:bodyPr lIns="0" tIns="45720" rIns="0" bIns="0" numCol="1" spcCol="0" anchor="b">
+            <a:noAutofit/>
+          </a:bodyPr>
+          <a:lstStyle/>
+          <a:p>
+            <a:pPr indent="0">
+              <a:lnSpc>
+                <a:spcPct val="100000"/>
+              </a:lnSpc>
+              <a:buNone/>
+            </a:pPr>
+            <a:r>
+              <a:rPr lang="pl-PL" sz="2400" b="0" u="none" strike="noStrike">
+                <a:solidFill>
+                  <a:schemeClr val="accent2">
+                    <a:lumMod val="75000"/>
+                  </a:schemeClr>
+                </a:solidFill>
+                <a:effectLst/>
+                <a:uFillTx/>
+                <a:latin typeface="Calibri"/>
+              </a:rPr>
+              <a:t>Diagram pakietów: model warstw systemu</a:t>
+            </a:r>
+            <a:endParaRPr lang="en-GB" sz="2400" b="0" u="none" strike="noStrike">
+              <a:solidFill>
+                <a:schemeClr val="lt1"/>
+              </a:solidFill>
+              <a:effectLst/>
+              <a:uFillTx/>
+              <a:latin typeface="Times New Roman"/>
+            </a:endParaRPr>
+          </a:p>
+        </p:txBody>
+      </p:sp>
+    </p:spTree>
+  </p:cSld>
+  <p:clrMapOvr>
+    <a:masterClrMapping/>
+  </p:clrMapOvr>
+</p:sld>
+</file>
+
+<file path=ppt/slides/slide61.xml><?xml version="1.0" encoding="utf-8"?>
+<p:sld xmlns:a="http://schemas.openxmlformats.org/drawingml/2006/main" xmlns:r="http://schemas.openxmlformats.org/officeDocument/2006/relationships" xmlns:p="http://schemas.openxmlformats.org/presentationml/2006/main">
+  <p:cSld>
+    <p:spTree>
+      <p:nvGrpSpPr>
+        <p:cNvPr id="1" name=""/>
+        <p:cNvGrpSpPr/>
+        <p:nvPr/>
+      </p:nvGrpSpPr>
+      <p:grpSpPr>
+        <a:xfrm>
+          <a:off x="0" y="0"/>
+          <a:ext cx="0" cy="0"/>
+          <a:chOff x="0" y="0"/>
+          <a:chExt cx="0" cy="0"/>
+        </a:xfrm>
+      </p:grpSpPr>
+      <p:sp>
+        <p:nvSpPr>
+          <p:cNvPr id="303" name="PlaceHolder 1"/>
+          <p:cNvSpPr>
+            <a:spLocks noGrp="1"/>
+          </p:cNvSpPr>
+          <p:nvPr>
+            <p:ph type="title"/>
+          </p:nvPr>
+        </p:nvSpPr>
+        <p:spPr>
+          <a:xfrm>
+            <a:off x="785880" y="428760"/>
+            <a:ext cx="7357680" cy="502920"/>
+          </a:xfrm>
+          <a:prstGeom prst="rect">
+            <a:avLst/>
+          </a:prstGeom>
+          <a:noFill/>
+          <a:ln w="0">
+            <a:noFill/>
+          </a:ln>
+        </p:spPr>
+        <p:txBody>
+          <a:bodyPr lIns="0" tIns="45720" rIns="0" bIns="0" numCol="1" spcCol="0" anchor="b">
+            <a:noAutofit/>
+          </a:bodyPr>
+          <a:lstStyle/>
+          <a:p>
+            <a:pPr indent="0">
+              <a:lnSpc>
+                <a:spcPct val="100000"/>
+              </a:lnSpc>
+              <a:buNone/>
+            </a:pPr>
+            <a:r>
+              <a:rPr lang="pl-PL" sz="2400" b="0" u="none" strike="noStrike">
+                <a:solidFill>
+                  <a:schemeClr val="accent2">
+                    <a:lumMod val="75000"/>
+                  </a:schemeClr>
+                </a:solidFill>
+                <a:effectLst/>
+                <a:uFillTx/>
+                <a:latin typeface="Calibri"/>
+              </a:rPr>
+              <a:t>Diagram komponentów systemu</a:t>
+            </a:r>
+            <a:endParaRPr lang="en-GB" sz="2400" b="0" u="none" strike="noStrike">
+              <a:solidFill>
+                <a:schemeClr val="lt1"/>
+              </a:solidFill>
+              <a:effectLst/>
+              <a:uFillTx/>
+              <a:latin typeface="Times New Roman"/>
+            </a:endParaRPr>
+          </a:p>
+        </p:txBody>
+      </p:sp>
+    </p:spTree>
+  </p:cSld>
+  <p:clrMapOvr>
+    <a:masterClrMapping/>
+  </p:clrMapOvr>
+</p:sld>
+</file>
+
+<file path=ppt/slides/slide62.xml><?xml version="1.0" encoding="utf-8"?>
+<p:sld xmlns:a="http://schemas.openxmlformats.org/drawingml/2006/main" xmlns:r="http://schemas.openxmlformats.org/officeDocument/2006/relationships" xmlns:p="http://schemas.openxmlformats.org/presentationml/2006/main">
+  <p:cSld>
+    <p:spTree>
+      <p:nvGrpSpPr>
+        <p:cNvPr id="1" name=""/>
+        <p:cNvGrpSpPr/>
+        <p:nvPr/>
+      </p:nvGrpSpPr>
+      <p:grpSpPr>
+        <a:xfrm>
+          <a:off x="0" y="0"/>
+          <a:ext cx="0" cy="0"/>
+          <a:chOff x="0" y="0"/>
+          <a:chExt cx="0" cy="0"/>
+        </a:xfrm>
+      </p:grpSpPr>
+      <p:sp>
+        <p:nvSpPr>
+          <p:cNvPr id="304" name="PlaceHolder 1"/>
+          <p:cNvSpPr>
+            <a:spLocks noGrp="1"/>
+          </p:cNvSpPr>
+          <p:nvPr>
+            <p:ph type="title"/>
+          </p:nvPr>
+        </p:nvSpPr>
+        <p:spPr>
+          <a:xfrm>
+            <a:off x="785880" y="428760"/>
+            <a:ext cx="7357680" cy="502920"/>
+          </a:xfrm>
+          <a:prstGeom prst="rect">
+            <a:avLst/>
+          </a:prstGeom>
+          <a:noFill/>
+          <a:ln w="0">
+            <a:noFill/>
+          </a:ln>
+        </p:spPr>
+        <p:txBody>
+          <a:bodyPr lIns="0" tIns="45720" rIns="0" bIns="0" numCol="1" spcCol="0" anchor="b">
+            <a:noAutofit/>
+          </a:bodyPr>
+          <a:lstStyle/>
+          <a:p>
+            <a:pPr indent="0">
+              <a:lnSpc>
+                <a:spcPct val="100000"/>
+              </a:lnSpc>
+              <a:buNone/>
+            </a:pPr>
+            <a:r>
+              <a:rPr lang="pl-PL" sz="2400" b="0" u="none" strike="noStrike">
+                <a:solidFill>
+                  <a:schemeClr val="accent2">
+                    <a:lumMod val="75000"/>
+                  </a:schemeClr>
+                </a:solidFill>
+                <a:effectLst/>
+                <a:uFillTx/>
+                <a:latin typeface="Calibri"/>
+              </a:rPr>
+              <a:t>Diagram wdrożenia systemu</a:t>
+            </a:r>
+            <a:endParaRPr lang="en-GB" sz="2400" b="0" u="none" strike="noStrike">
+              <a:solidFill>
+                <a:schemeClr val="lt1"/>
+              </a:solidFill>
+              <a:effectLst/>
+              <a:uFillTx/>
+              <a:latin typeface="Times New Roman"/>
+            </a:endParaRPr>
+          </a:p>
+        </p:txBody>
+      </p:sp>
+    </p:spTree>
+  </p:cSld>
+  <p:clrMapOvr>
+    <a:masterClrMapping/>
+  </p:clrMapOvr>
+</p:sld>
+</file>
+
+<file path=ppt/slides/slide63.xml><?xml version="1.0" encoding="utf-8"?>
+<p:sld xmlns:a="http://schemas.openxmlformats.org/drawingml/2006/main" xmlns:r="http://schemas.openxmlformats.org/officeDocument/2006/relationships" xmlns:p="http://schemas.openxmlformats.org/presentationml/2006/main">
+  <p:cSld>
+    <p:spTree>
+      <p:nvGrpSpPr>
+        <p:cNvPr id="1" name=""/>
+        <p:cNvGrpSpPr/>
+        <p:nvPr/>
+      </p:nvGrpSpPr>
+      <p:grpSpPr>
+        <a:xfrm>
+          <a:off x="0" y="0"/>
+          <a:ext cx="0" cy="0"/>
+          <a:chOff x="0" y="0"/>
+          <a:chExt cx="0" cy="0"/>
+        </a:xfrm>
+      </p:grpSpPr>
+      <p:sp>
+        <p:nvSpPr>
+          <p:cNvPr id="305" name="PlaceHolder 1"/>
+          <p:cNvSpPr>
+            <a:spLocks noGrp="1"/>
+          </p:cNvSpPr>
+          <p:nvPr>
+            <p:ph type="title"/>
+          </p:nvPr>
+        </p:nvSpPr>
+        <p:spPr>
+          <a:xfrm>
+            <a:off x="785880" y="428760"/>
+            <a:ext cx="7357680" cy="502920"/>
+          </a:xfrm>
+          <a:prstGeom prst="rect">
+            <a:avLst/>
+          </a:prstGeom>
+          <a:noFill/>
+          <a:ln w="0">
+            <a:noFill/>
+          </a:ln>
+        </p:spPr>
+        <p:txBody>
+          <a:bodyPr lIns="0" tIns="45720" rIns="0" bIns="0" numCol="1" spcCol="0" anchor="b">
+            <a:noAutofit/>
+          </a:bodyPr>
+          <a:lstStyle/>
+          <a:p>
+            <a:pPr indent="0">
+              <a:lnSpc>
+                <a:spcPct val="100000"/>
+              </a:lnSpc>
+              <a:buNone/>
+            </a:pPr>
+            <a:r>
+              <a:rPr lang="pl-PL" sz="2400" b="0" u="none" strike="noStrike">
+                <a:solidFill>
+                  <a:schemeClr val="accent2">
+                    <a:lumMod val="75000"/>
+                  </a:schemeClr>
+                </a:solidFill>
+                <a:effectLst/>
+                <a:uFillTx/>
+                <a:latin typeface="Calibri"/>
+              </a:rPr>
+              <a:t>Kod systemu: jako wynik transformacji</a:t>
+            </a:r>
+            <a:endParaRPr lang="en-GB" sz="2400" b="0" u="none" strike="noStrike">
+              <a:solidFill>
+                <a:schemeClr val="lt1"/>
+              </a:solidFill>
+              <a:effectLst/>
+              <a:uFillTx/>
+              <a:latin typeface="Times New Roman"/>
+            </a:endParaRPr>
+          </a:p>
+        </p:txBody>
+      </p:sp>
+    </p:spTree>
+  </p:cSld>
+  <p:clrMapOvr>
+    <a:masterClrMapping/>
+  </p:clrMapOvr>
+</p:sld>
+</file>
+
 <file path=ppt/slides/slide7.xml><?xml version="1.0" encoding="utf-8"?>
 <p:sld xmlns:a="http://schemas.openxmlformats.org/drawingml/2006/main" xmlns:r="http://schemas.openxmlformats.org/officeDocument/2006/relationships" xmlns:p="http://schemas.openxmlformats.org/presentationml/2006/main">
   <p:cSld>

--- a/Przeglad_koncowy_notes_ai.pptx
+++ b/Przeglad_koncowy_notes_ai.pptx
@@ -171,6 +171,11 @@
       </a:defRPr>
     </a:lvl9pPr>
   </p:defaultTextStyle>
+  <p:extLst>
+    <p:ext uri="{EFAFB233-063F-42B5-8137-9DF3F51BA10A}">
+      <p15:sldGuideLst xmlns:p15="http://schemas.microsoft.com/office/powerpoint/2012/main"/>
+    </p:ext>
+  </p:extLst>
 </p:presentation>
 </file>
 
@@ -45870,7 +45875,7 @@
 </file>
 
 <file path=ppt/slides/slide59.xml><?xml version="1.0" encoding="utf-8"?>
-<p:sld xmlns:a="http://schemas.openxmlformats.org/drawingml/2006/main" xmlns:r="http://schemas.openxmlformats.org/officeDocument/2006/relationships" xmlns:p="http://schemas.openxmlformats.org/presentationml/2006/main">
+<p:sld xmlns:a="http://schemas.openxmlformats.org/drawingml/2006/main" xmlns:r="http://schemas.openxmlformats.org/officeDocument/2006/relationships" xmlns:p="http://schemas.openxmlformats.org/presentationml/2006/main" show="0">
   <p:cSld>
     <p:spTree>
       <p:nvGrpSpPr>
@@ -47223,7 +47228,7 @@
               </a:tabLst>
             </a:pPr>
             <a:r>
-              <a:rPr lang="pl-PL" sz="2400" b="0" u="none" strike="noStrike">
+              <a:rPr lang="pl-PL" sz="2400" b="0" u="none" strike="noStrike" dirty="0">
                 <a:solidFill>
                   <a:schemeClr val="accent2">
                     <a:lumMod val="75000"/>
@@ -47233,9 +47238,9 @@
                 <a:uFillTx/>
                 <a:latin typeface="Calibri"/>
               </a:rPr>
-              <a:t>Diagram pakietów: model warstw systemu</a:t>
+              <a:t>Diagram pakietów: model warstw systemu, każda warstwa podzielona zgodnie z modelem obszarów systemu</a:t>
             </a:r>
-            <a:endParaRPr lang="en-US" sz="2400" b="0" u="none" strike="noStrike">
+            <a:endParaRPr lang="en-US" sz="2400" b="0" u="none" strike="noStrike" dirty="0">
               <a:solidFill>
                 <a:schemeClr val="dk1"/>
               </a:solidFill>
@@ -47246,6 +47251,36 @@
           </a:p>
         </p:txBody>
       </p:sp>
+      <p:pic>
+        <p:nvPicPr>
+          <p:cNvPr id="3" name="Picture 2">
+            <a:extLst>
+              <a:ext uri="{FF2B5EF4-FFF2-40B4-BE49-F238E27FC236}">
+                <a16:creationId xmlns:a16="http://schemas.microsoft.com/office/drawing/2014/main" id="{8422A43D-138C-4144-F3FB-DD974D6447DC}"/>
+              </a:ext>
+            </a:extLst>
+          </p:cNvPr>
+          <p:cNvPicPr>
+            <a:picLocks noChangeAspect="1"/>
+          </p:cNvPicPr>
+          <p:nvPr/>
+        </p:nvPicPr>
+        <p:blipFill>
+          <a:blip r:embed="rId2"/>
+          <a:stretch>
+            <a:fillRect/>
+          </a:stretch>
+        </p:blipFill>
+        <p:spPr>
+          <a:xfrm>
+            <a:off x="2397013" y="1866819"/>
+            <a:ext cx="4349974" cy="3124361"/>
+          </a:xfrm>
+          <a:prstGeom prst="rect">
+            <a:avLst/>
+          </a:prstGeom>
+        </p:spPr>
+      </p:pic>
     </p:spTree>
   </p:cSld>
   <p:clrMapOvr>
